--- a/public/videos/repositories/netcafe-seat-watch/netcafe-seat-watch-tech-preview.pptx
+++ b/public/videos/repositories/netcafe-seat-watch/netcafe-seat-watch-tech-preview.pptx
@@ -134,7 +134,7 @@
           <p:cNvPr id="2" name="タイトル 1">
             <a:extLst>
               <a:ext uri="{FF2B5EF4-FFF2-40B4-BE49-F238E27FC236}">
-                <a16:creationId xmlns:a16="http://schemas.microsoft.com/office/drawing/2014/main" id="{4A38B7A8-711F-8C99-CD75-3CA64629188C}"/>
+                <a16:creationId xmlns:a16="http://schemas.microsoft.com/office/drawing/2014/main" id="{4D817F98-F90C-468B-11E5-A172E4BEF24E}"/>
               </a:ext>
             </a:extLst>
           </p:cNvPr>
@@ -171,7 +171,7 @@
           <p:cNvPr id="3" name="字幕 2">
             <a:extLst>
               <a:ext uri="{FF2B5EF4-FFF2-40B4-BE49-F238E27FC236}">
-                <a16:creationId xmlns:a16="http://schemas.microsoft.com/office/drawing/2014/main" id="{5157E60E-BA6F-2876-7317-DF2D54E7A3F9}"/>
+                <a16:creationId xmlns:a16="http://schemas.microsoft.com/office/drawing/2014/main" id="{AAC575B5-A406-C01E-8772-6AF1A64DCB4C}"/>
               </a:ext>
             </a:extLst>
           </p:cNvPr>
@@ -241,7 +241,7 @@
           <p:cNvPr id="4" name="日付プレースホルダー 3">
             <a:extLst>
               <a:ext uri="{FF2B5EF4-FFF2-40B4-BE49-F238E27FC236}">
-                <a16:creationId xmlns:a16="http://schemas.microsoft.com/office/drawing/2014/main" id="{7ABAB1A1-4B0B-A7E8-1A0F-49C71420FEF1}"/>
+                <a16:creationId xmlns:a16="http://schemas.microsoft.com/office/drawing/2014/main" id="{06156412-1381-F890-2643-8CB3C6AD956F}"/>
               </a:ext>
             </a:extLst>
           </p:cNvPr>
@@ -257,7 +257,7 @@
           <a:bodyPr/>
           <a:lstStyle/>
           <a:p>
-            <a:fld id="{CBFDAB16-53B6-4EF0-B478-06DEEBE0E714}" type="datetimeFigureOut">
+            <a:fld id="{2703F04C-E76C-4633-818E-73CD24F44AAC}" type="datetimeFigureOut">
               <a:rPr kumimoji="1" lang="ja-JP" altLang="en-US" smtClean="0"/>
               <a:t>2026/7/30</a:t>
             </a:fld>
@@ -270,7 +270,7 @@
           <p:cNvPr id="5" name="フッター プレースホルダー 4">
             <a:extLst>
               <a:ext uri="{FF2B5EF4-FFF2-40B4-BE49-F238E27FC236}">
-                <a16:creationId xmlns:a16="http://schemas.microsoft.com/office/drawing/2014/main" id="{9BAB490F-E3C0-586C-4454-3A1EC4D518C5}"/>
+                <a16:creationId xmlns:a16="http://schemas.microsoft.com/office/drawing/2014/main" id="{A2252A43-40BB-208F-34D6-FD6416C84307}"/>
               </a:ext>
             </a:extLst>
           </p:cNvPr>
@@ -295,7 +295,7 @@
           <p:cNvPr id="6" name="スライド番号プレースホルダー 5">
             <a:extLst>
               <a:ext uri="{FF2B5EF4-FFF2-40B4-BE49-F238E27FC236}">
-                <a16:creationId xmlns:a16="http://schemas.microsoft.com/office/drawing/2014/main" id="{187C8B3C-E710-9804-330D-1727C3556EC9}"/>
+                <a16:creationId xmlns:a16="http://schemas.microsoft.com/office/drawing/2014/main" id="{DCFC65F1-CAC9-D118-62C8-506ADF9D0866}"/>
               </a:ext>
             </a:extLst>
           </p:cNvPr>
@@ -311,7 +311,7 @@
           <a:bodyPr/>
           <a:lstStyle/>
           <a:p>
-            <a:fld id="{8E9CB072-4314-46FB-B7F3-661D33354668}" type="slidenum">
+            <a:fld id="{B10103F1-F9BE-4943-ACF2-437C6ECA534A}" type="slidenum">
               <a:rPr kumimoji="1" lang="ja-JP" altLang="en-US" smtClean="0"/>
               <a:t>‹#›</a:t>
             </a:fld>
@@ -322,7 +322,7 @@
     </p:spTree>
     <p:extLst>
       <p:ext uri="{BB962C8B-B14F-4D97-AF65-F5344CB8AC3E}">
-        <p14:creationId xmlns:p14="http://schemas.microsoft.com/office/powerpoint/2010/main" val="2963727192"/>
+        <p14:creationId xmlns:p14="http://schemas.microsoft.com/office/powerpoint/2010/main" val="2830907159"/>
       </p:ext>
     </p:extLst>
   </p:cSld>
@@ -354,7 +354,7 @@
           <p:cNvPr id="2" name="タイトル 1">
             <a:extLst>
               <a:ext uri="{FF2B5EF4-FFF2-40B4-BE49-F238E27FC236}">
-                <a16:creationId xmlns:a16="http://schemas.microsoft.com/office/drawing/2014/main" id="{4101C937-9B56-B12F-371B-FB4DE44FCE9C}"/>
+                <a16:creationId xmlns:a16="http://schemas.microsoft.com/office/drawing/2014/main" id="{46BF4449-F4C7-5E1B-70F9-421C9264788B}"/>
               </a:ext>
             </a:extLst>
           </p:cNvPr>
@@ -382,7 +382,7 @@
           <p:cNvPr id="3" name="縦書きテキスト プレースホルダー 2">
             <a:extLst>
               <a:ext uri="{FF2B5EF4-FFF2-40B4-BE49-F238E27FC236}">
-                <a16:creationId xmlns:a16="http://schemas.microsoft.com/office/drawing/2014/main" id="{0D84CF9A-DC6B-E853-ACEC-5BE02D08888E}"/>
+                <a16:creationId xmlns:a16="http://schemas.microsoft.com/office/drawing/2014/main" id="{7D53CD55-1C54-1310-2549-21D63E1444D2}"/>
               </a:ext>
             </a:extLst>
           </p:cNvPr>
@@ -471,7 +471,7 @@
           <p:cNvPr id="4" name="日付プレースホルダー 3">
             <a:extLst>
               <a:ext uri="{FF2B5EF4-FFF2-40B4-BE49-F238E27FC236}">
-                <a16:creationId xmlns:a16="http://schemas.microsoft.com/office/drawing/2014/main" id="{3DB13234-FC9F-B4D3-51D1-DCA9BF6AA126}"/>
+                <a16:creationId xmlns:a16="http://schemas.microsoft.com/office/drawing/2014/main" id="{51C80DAA-7AE3-C3A3-58D3-57D952800CAA}"/>
               </a:ext>
             </a:extLst>
           </p:cNvPr>
@@ -487,7 +487,7 @@
           <a:bodyPr/>
           <a:lstStyle/>
           <a:p>
-            <a:fld id="{CBFDAB16-53B6-4EF0-B478-06DEEBE0E714}" type="datetimeFigureOut">
+            <a:fld id="{2703F04C-E76C-4633-818E-73CD24F44AAC}" type="datetimeFigureOut">
               <a:rPr kumimoji="1" lang="ja-JP" altLang="en-US" smtClean="0"/>
               <a:t>2026/7/30</a:t>
             </a:fld>
@@ -500,7 +500,7 @@
           <p:cNvPr id="5" name="フッター プレースホルダー 4">
             <a:extLst>
               <a:ext uri="{FF2B5EF4-FFF2-40B4-BE49-F238E27FC236}">
-                <a16:creationId xmlns:a16="http://schemas.microsoft.com/office/drawing/2014/main" id="{291D060E-8261-2D19-1BA0-C85170A4C34A}"/>
+                <a16:creationId xmlns:a16="http://schemas.microsoft.com/office/drawing/2014/main" id="{7F0683D9-9707-1EA7-A982-D6D0FD4EBCB8}"/>
               </a:ext>
             </a:extLst>
           </p:cNvPr>
@@ -525,7 +525,7 @@
           <p:cNvPr id="6" name="スライド番号プレースホルダー 5">
             <a:extLst>
               <a:ext uri="{FF2B5EF4-FFF2-40B4-BE49-F238E27FC236}">
-                <a16:creationId xmlns:a16="http://schemas.microsoft.com/office/drawing/2014/main" id="{6CA35811-6B7C-EA17-6E14-F5289E1A07FF}"/>
+                <a16:creationId xmlns:a16="http://schemas.microsoft.com/office/drawing/2014/main" id="{7B25473C-9D98-41AE-1773-35A880E472AA}"/>
               </a:ext>
             </a:extLst>
           </p:cNvPr>
@@ -541,7 +541,7 @@
           <a:bodyPr/>
           <a:lstStyle/>
           <a:p>
-            <a:fld id="{8E9CB072-4314-46FB-B7F3-661D33354668}" type="slidenum">
+            <a:fld id="{B10103F1-F9BE-4943-ACF2-437C6ECA534A}" type="slidenum">
               <a:rPr kumimoji="1" lang="ja-JP" altLang="en-US" smtClean="0"/>
               <a:t>‹#›</a:t>
             </a:fld>
@@ -552,7 +552,7 @@
     </p:spTree>
     <p:extLst>
       <p:ext uri="{BB962C8B-B14F-4D97-AF65-F5344CB8AC3E}">
-        <p14:creationId xmlns:p14="http://schemas.microsoft.com/office/powerpoint/2010/main" val="2593822448"/>
+        <p14:creationId xmlns:p14="http://schemas.microsoft.com/office/powerpoint/2010/main" val="3537382532"/>
       </p:ext>
     </p:extLst>
   </p:cSld>
@@ -584,7 +584,7 @@
           <p:cNvPr id="2" name="縦書きタイトル 1">
             <a:extLst>
               <a:ext uri="{FF2B5EF4-FFF2-40B4-BE49-F238E27FC236}">
-                <a16:creationId xmlns:a16="http://schemas.microsoft.com/office/drawing/2014/main" id="{571FCBBE-586A-0A34-29BB-74A3B7028CD9}"/>
+                <a16:creationId xmlns:a16="http://schemas.microsoft.com/office/drawing/2014/main" id="{381E17F8-1DF9-BF46-B6DF-6FCE1056502D}"/>
               </a:ext>
             </a:extLst>
           </p:cNvPr>
@@ -617,7 +617,7 @@
           <p:cNvPr id="3" name="縦書きテキスト プレースホルダー 2">
             <a:extLst>
               <a:ext uri="{FF2B5EF4-FFF2-40B4-BE49-F238E27FC236}">
-                <a16:creationId xmlns:a16="http://schemas.microsoft.com/office/drawing/2014/main" id="{1030C252-50D5-5266-059E-55BFE8678EBF}"/>
+                <a16:creationId xmlns:a16="http://schemas.microsoft.com/office/drawing/2014/main" id="{A1E59EC6-C80D-CAD7-F67F-71B523A470FE}"/>
               </a:ext>
             </a:extLst>
           </p:cNvPr>
@@ -711,7 +711,7 @@
           <p:cNvPr id="4" name="日付プレースホルダー 3">
             <a:extLst>
               <a:ext uri="{FF2B5EF4-FFF2-40B4-BE49-F238E27FC236}">
-                <a16:creationId xmlns:a16="http://schemas.microsoft.com/office/drawing/2014/main" id="{CDAC1719-748A-F9C6-2F8B-1D0F31422A2B}"/>
+                <a16:creationId xmlns:a16="http://schemas.microsoft.com/office/drawing/2014/main" id="{39869683-7FAD-6E74-C57F-E17D2D9FF55E}"/>
               </a:ext>
             </a:extLst>
           </p:cNvPr>
@@ -727,7 +727,7 @@
           <a:bodyPr/>
           <a:lstStyle/>
           <a:p>
-            <a:fld id="{CBFDAB16-53B6-4EF0-B478-06DEEBE0E714}" type="datetimeFigureOut">
+            <a:fld id="{2703F04C-E76C-4633-818E-73CD24F44AAC}" type="datetimeFigureOut">
               <a:rPr kumimoji="1" lang="ja-JP" altLang="en-US" smtClean="0"/>
               <a:t>2026/7/30</a:t>
             </a:fld>
@@ -740,7 +740,7 @@
           <p:cNvPr id="5" name="フッター プレースホルダー 4">
             <a:extLst>
               <a:ext uri="{FF2B5EF4-FFF2-40B4-BE49-F238E27FC236}">
-                <a16:creationId xmlns:a16="http://schemas.microsoft.com/office/drawing/2014/main" id="{AFAAC8AE-306D-D6A8-FF41-B6CFB5CCC3D8}"/>
+                <a16:creationId xmlns:a16="http://schemas.microsoft.com/office/drawing/2014/main" id="{2E8BE3D6-C8F4-21CB-C8F5-2E0D316F520C}"/>
               </a:ext>
             </a:extLst>
           </p:cNvPr>
@@ -765,7 +765,7 @@
           <p:cNvPr id="6" name="スライド番号プレースホルダー 5">
             <a:extLst>
               <a:ext uri="{FF2B5EF4-FFF2-40B4-BE49-F238E27FC236}">
-                <a16:creationId xmlns:a16="http://schemas.microsoft.com/office/drawing/2014/main" id="{71228473-ABC4-0916-B233-92F17B322F59}"/>
+                <a16:creationId xmlns:a16="http://schemas.microsoft.com/office/drawing/2014/main" id="{D5D88F0B-3234-5E71-F2AF-69D3E320133C}"/>
               </a:ext>
             </a:extLst>
           </p:cNvPr>
@@ -781,7 +781,7 @@
           <a:bodyPr/>
           <a:lstStyle/>
           <a:p>
-            <a:fld id="{8E9CB072-4314-46FB-B7F3-661D33354668}" type="slidenum">
+            <a:fld id="{B10103F1-F9BE-4943-ACF2-437C6ECA534A}" type="slidenum">
               <a:rPr kumimoji="1" lang="ja-JP" altLang="en-US" smtClean="0"/>
               <a:t>‹#›</a:t>
             </a:fld>
@@ -792,7 +792,7 @@
     </p:spTree>
     <p:extLst>
       <p:ext uri="{BB962C8B-B14F-4D97-AF65-F5344CB8AC3E}">
-        <p14:creationId xmlns:p14="http://schemas.microsoft.com/office/powerpoint/2010/main" val="1943343305"/>
+        <p14:creationId xmlns:p14="http://schemas.microsoft.com/office/powerpoint/2010/main" val="1997842446"/>
       </p:ext>
     </p:extLst>
   </p:cSld>
@@ -824,7 +824,7 @@
           <p:cNvPr id="2" name="タイトル 1">
             <a:extLst>
               <a:ext uri="{FF2B5EF4-FFF2-40B4-BE49-F238E27FC236}">
-                <a16:creationId xmlns:a16="http://schemas.microsoft.com/office/drawing/2014/main" id="{8ED6A26B-C773-8732-313E-A728B0EE1DD0}"/>
+                <a16:creationId xmlns:a16="http://schemas.microsoft.com/office/drawing/2014/main" id="{A3AED613-77B9-98C5-BE2A-D51F7168C2A4}"/>
               </a:ext>
             </a:extLst>
           </p:cNvPr>
@@ -852,7 +852,7 @@
           <p:cNvPr id="3" name="コンテンツ プレースホルダー 2">
             <a:extLst>
               <a:ext uri="{FF2B5EF4-FFF2-40B4-BE49-F238E27FC236}">
-                <a16:creationId xmlns:a16="http://schemas.microsoft.com/office/drawing/2014/main" id="{718560FF-547B-14D5-D8CD-5B70ADA17F7A}"/>
+                <a16:creationId xmlns:a16="http://schemas.microsoft.com/office/drawing/2014/main" id="{4332B59A-646E-5A34-EE62-7639601F7FFB}"/>
               </a:ext>
             </a:extLst>
           </p:cNvPr>
@@ -941,7 +941,7 @@
           <p:cNvPr id="4" name="日付プレースホルダー 3">
             <a:extLst>
               <a:ext uri="{FF2B5EF4-FFF2-40B4-BE49-F238E27FC236}">
-                <a16:creationId xmlns:a16="http://schemas.microsoft.com/office/drawing/2014/main" id="{21602B3D-FEA5-AF9E-F267-F058D04D285F}"/>
+                <a16:creationId xmlns:a16="http://schemas.microsoft.com/office/drawing/2014/main" id="{CEF9E9CE-870D-F25E-DAEC-DBE0DC0D7E80}"/>
               </a:ext>
             </a:extLst>
           </p:cNvPr>
@@ -957,7 +957,7 @@
           <a:bodyPr/>
           <a:lstStyle/>
           <a:p>
-            <a:fld id="{CBFDAB16-53B6-4EF0-B478-06DEEBE0E714}" type="datetimeFigureOut">
+            <a:fld id="{2703F04C-E76C-4633-818E-73CD24F44AAC}" type="datetimeFigureOut">
               <a:rPr kumimoji="1" lang="ja-JP" altLang="en-US" smtClean="0"/>
               <a:t>2026/7/30</a:t>
             </a:fld>
@@ -970,7 +970,7 @@
           <p:cNvPr id="5" name="フッター プレースホルダー 4">
             <a:extLst>
               <a:ext uri="{FF2B5EF4-FFF2-40B4-BE49-F238E27FC236}">
-                <a16:creationId xmlns:a16="http://schemas.microsoft.com/office/drawing/2014/main" id="{1FFEA6FF-A8B8-4FA7-3B70-9B434452A091}"/>
+                <a16:creationId xmlns:a16="http://schemas.microsoft.com/office/drawing/2014/main" id="{460F9E0E-9347-2632-823F-FAE5D00B87F3}"/>
               </a:ext>
             </a:extLst>
           </p:cNvPr>
@@ -995,7 +995,7 @@
           <p:cNvPr id="6" name="スライド番号プレースホルダー 5">
             <a:extLst>
               <a:ext uri="{FF2B5EF4-FFF2-40B4-BE49-F238E27FC236}">
-                <a16:creationId xmlns:a16="http://schemas.microsoft.com/office/drawing/2014/main" id="{CCD6156A-3049-4A67-F07A-55F0BE5A011C}"/>
+                <a16:creationId xmlns:a16="http://schemas.microsoft.com/office/drawing/2014/main" id="{237DCEFE-D8A2-69BF-ED82-3F2F8CBB45EE}"/>
               </a:ext>
             </a:extLst>
           </p:cNvPr>
@@ -1011,7 +1011,7 @@
           <a:bodyPr/>
           <a:lstStyle/>
           <a:p>
-            <a:fld id="{8E9CB072-4314-46FB-B7F3-661D33354668}" type="slidenum">
+            <a:fld id="{B10103F1-F9BE-4943-ACF2-437C6ECA534A}" type="slidenum">
               <a:rPr kumimoji="1" lang="ja-JP" altLang="en-US" smtClean="0"/>
               <a:t>‹#›</a:t>
             </a:fld>
@@ -1022,7 +1022,7 @@
     </p:spTree>
     <p:extLst>
       <p:ext uri="{BB962C8B-B14F-4D97-AF65-F5344CB8AC3E}">
-        <p14:creationId xmlns:p14="http://schemas.microsoft.com/office/powerpoint/2010/main" val="1828193019"/>
+        <p14:creationId xmlns:p14="http://schemas.microsoft.com/office/powerpoint/2010/main" val="2343984592"/>
       </p:ext>
     </p:extLst>
   </p:cSld>
@@ -1054,7 +1054,7 @@
           <p:cNvPr id="2" name="タイトル 1">
             <a:extLst>
               <a:ext uri="{FF2B5EF4-FFF2-40B4-BE49-F238E27FC236}">
-                <a16:creationId xmlns:a16="http://schemas.microsoft.com/office/drawing/2014/main" id="{698C9AA8-CEE9-E0C3-3794-1765CE6F9829}"/>
+                <a16:creationId xmlns:a16="http://schemas.microsoft.com/office/drawing/2014/main" id="{037990E5-27F2-BDA5-7D17-CF65426307DF}"/>
               </a:ext>
             </a:extLst>
           </p:cNvPr>
@@ -1091,7 +1091,7 @@
           <p:cNvPr id="3" name="テキスト プレースホルダー 2">
             <a:extLst>
               <a:ext uri="{FF2B5EF4-FFF2-40B4-BE49-F238E27FC236}">
-                <a16:creationId xmlns:a16="http://schemas.microsoft.com/office/drawing/2014/main" id="{82393C30-211C-EBDD-E108-799A96229086}"/>
+                <a16:creationId xmlns:a16="http://schemas.microsoft.com/office/drawing/2014/main" id="{4CE1DF6A-C4A0-EA9A-E757-DB87872FCB8D}"/>
               </a:ext>
             </a:extLst>
           </p:cNvPr>
@@ -1216,7 +1216,7 @@
           <p:cNvPr id="4" name="日付プレースホルダー 3">
             <a:extLst>
               <a:ext uri="{FF2B5EF4-FFF2-40B4-BE49-F238E27FC236}">
-                <a16:creationId xmlns:a16="http://schemas.microsoft.com/office/drawing/2014/main" id="{D53C7AAC-483D-7034-7362-F3C524470E79}"/>
+                <a16:creationId xmlns:a16="http://schemas.microsoft.com/office/drawing/2014/main" id="{C2F7A182-F2D5-E0D5-1317-E408557F1D45}"/>
               </a:ext>
             </a:extLst>
           </p:cNvPr>
@@ -1232,7 +1232,7 @@
           <a:bodyPr/>
           <a:lstStyle/>
           <a:p>
-            <a:fld id="{CBFDAB16-53B6-4EF0-B478-06DEEBE0E714}" type="datetimeFigureOut">
+            <a:fld id="{2703F04C-E76C-4633-818E-73CD24F44AAC}" type="datetimeFigureOut">
               <a:rPr kumimoji="1" lang="ja-JP" altLang="en-US" smtClean="0"/>
               <a:t>2026/7/30</a:t>
             </a:fld>
@@ -1245,7 +1245,7 @@
           <p:cNvPr id="5" name="フッター プレースホルダー 4">
             <a:extLst>
               <a:ext uri="{FF2B5EF4-FFF2-40B4-BE49-F238E27FC236}">
-                <a16:creationId xmlns:a16="http://schemas.microsoft.com/office/drawing/2014/main" id="{7DAE800D-5212-4E9C-6249-FA1BF6331EC9}"/>
+                <a16:creationId xmlns:a16="http://schemas.microsoft.com/office/drawing/2014/main" id="{3B68830A-4F68-2EE8-E109-286E7848364F}"/>
               </a:ext>
             </a:extLst>
           </p:cNvPr>
@@ -1270,7 +1270,7 @@
           <p:cNvPr id="6" name="スライド番号プレースホルダー 5">
             <a:extLst>
               <a:ext uri="{FF2B5EF4-FFF2-40B4-BE49-F238E27FC236}">
-                <a16:creationId xmlns:a16="http://schemas.microsoft.com/office/drawing/2014/main" id="{0B1A6FC1-E425-3F97-176D-2FFA8F7C5729}"/>
+                <a16:creationId xmlns:a16="http://schemas.microsoft.com/office/drawing/2014/main" id="{1DBF0082-BC2A-3F69-BD0B-3CF7914931EA}"/>
               </a:ext>
             </a:extLst>
           </p:cNvPr>
@@ -1286,7 +1286,7 @@
           <a:bodyPr/>
           <a:lstStyle/>
           <a:p>
-            <a:fld id="{8E9CB072-4314-46FB-B7F3-661D33354668}" type="slidenum">
+            <a:fld id="{B10103F1-F9BE-4943-ACF2-437C6ECA534A}" type="slidenum">
               <a:rPr kumimoji="1" lang="ja-JP" altLang="en-US" smtClean="0"/>
               <a:t>‹#›</a:t>
             </a:fld>
@@ -1297,7 +1297,7 @@
     </p:spTree>
     <p:extLst>
       <p:ext uri="{BB962C8B-B14F-4D97-AF65-F5344CB8AC3E}">
-        <p14:creationId xmlns:p14="http://schemas.microsoft.com/office/powerpoint/2010/main" val="128886725"/>
+        <p14:creationId xmlns:p14="http://schemas.microsoft.com/office/powerpoint/2010/main" val="3729321184"/>
       </p:ext>
     </p:extLst>
   </p:cSld>
@@ -1329,7 +1329,7 @@
           <p:cNvPr id="2" name="タイトル 1">
             <a:extLst>
               <a:ext uri="{FF2B5EF4-FFF2-40B4-BE49-F238E27FC236}">
-                <a16:creationId xmlns:a16="http://schemas.microsoft.com/office/drawing/2014/main" id="{B579C73C-53BA-65B6-D014-3AA0CE2AA523}"/>
+                <a16:creationId xmlns:a16="http://schemas.microsoft.com/office/drawing/2014/main" id="{DA227FF4-8C1E-1734-284F-B7329B7D8140}"/>
               </a:ext>
             </a:extLst>
           </p:cNvPr>
@@ -1357,7 +1357,7 @@
           <p:cNvPr id="3" name="コンテンツ プレースホルダー 2">
             <a:extLst>
               <a:ext uri="{FF2B5EF4-FFF2-40B4-BE49-F238E27FC236}">
-                <a16:creationId xmlns:a16="http://schemas.microsoft.com/office/drawing/2014/main" id="{7B1568F6-73F1-E2B3-DEAB-94F085B4DF63}"/>
+                <a16:creationId xmlns:a16="http://schemas.microsoft.com/office/drawing/2014/main" id="{07037D6E-077E-CD45-3F3C-EDC717B30AF4}"/>
               </a:ext>
             </a:extLst>
           </p:cNvPr>
@@ -1451,7 +1451,7 @@
           <p:cNvPr id="4" name="コンテンツ プレースホルダー 3">
             <a:extLst>
               <a:ext uri="{FF2B5EF4-FFF2-40B4-BE49-F238E27FC236}">
-                <a16:creationId xmlns:a16="http://schemas.microsoft.com/office/drawing/2014/main" id="{9AA41721-33E9-24DA-51D7-F80640C0FFC5}"/>
+                <a16:creationId xmlns:a16="http://schemas.microsoft.com/office/drawing/2014/main" id="{D5EBF92C-F964-5BE2-B962-D0F67A6251B6}"/>
               </a:ext>
             </a:extLst>
           </p:cNvPr>
@@ -1545,7 +1545,7 @@
           <p:cNvPr id="5" name="日付プレースホルダー 4">
             <a:extLst>
               <a:ext uri="{FF2B5EF4-FFF2-40B4-BE49-F238E27FC236}">
-                <a16:creationId xmlns:a16="http://schemas.microsoft.com/office/drawing/2014/main" id="{6DD7FC06-BD6E-08AC-F182-1B7E4131E68F}"/>
+                <a16:creationId xmlns:a16="http://schemas.microsoft.com/office/drawing/2014/main" id="{B3BCA861-C73D-E80B-8855-45F467C607A3}"/>
               </a:ext>
             </a:extLst>
           </p:cNvPr>
@@ -1561,7 +1561,7 @@
           <a:bodyPr/>
           <a:lstStyle/>
           <a:p>
-            <a:fld id="{CBFDAB16-53B6-4EF0-B478-06DEEBE0E714}" type="datetimeFigureOut">
+            <a:fld id="{2703F04C-E76C-4633-818E-73CD24F44AAC}" type="datetimeFigureOut">
               <a:rPr kumimoji="1" lang="ja-JP" altLang="en-US" smtClean="0"/>
               <a:t>2026/7/30</a:t>
             </a:fld>
@@ -1574,7 +1574,7 @@
           <p:cNvPr id="6" name="フッター プレースホルダー 5">
             <a:extLst>
               <a:ext uri="{FF2B5EF4-FFF2-40B4-BE49-F238E27FC236}">
-                <a16:creationId xmlns:a16="http://schemas.microsoft.com/office/drawing/2014/main" id="{F83AA59D-D2DF-1CC4-15E5-7EE04CADA40D}"/>
+                <a16:creationId xmlns:a16="http://schemas.microsoft.com/office/drawing/2014/main" id="{D3DBD5A5-92C0-2707-7E0D-1C83BF51B10D}"/>
               </a:ext>
             </a:extLst>
           </p:cNvPr>
@@ -1599,7 +1599,7 @@
           <p:cNvPr id="7" name="スライド番号プレースホルダー 6">
             <a:extLst>
               <a:ext uri="{FF2B5EF4-FFF2-40B4-BE49-F238E27FC236}">
-                <a16:creationId xmlns:a16="http://schemas.microsoft.com/office/drawing/2014/main" id="{F8AEB5C1-A88D-A619-A208-CA5DE9B8024B}"/>
+                <a16:creationId xmlns:a16="http://schemas.microsoft.com/office/drawing/2014/main" id="{8CBFB143-936D-76E1-237C-98900D668AEC}"/>
               </a:ext>
             </a:extLst>
           </p:cNvPr>
@@ -1615,7 +1615,7 @@
           <a:bodyPr/>
           <a:lstStyle/>
           <a:p>
-            <a:fld id="{8E9CB072-4314-46FB-B7F3-661D33354668}" type="slidenum">
+            <a:fld id="{B10103F1-F9BE-4943-ACF2-437C6ECA534A}" type="slidenum">
               <a:rPr kumimoji="1" lang="ja-JP" altLang="en-US" smtClean="0"/>
               <a:t>‹#›</a:t>
             </a:fld>
@@ -1626,7 +1626,7 @@
     </p:spTree>
     <p:extLst>
       <p:ext uri="{BB962C8B-B14F-4D97-AF65-F5344CB8AC3E}">
-        <p14:creationId xmlns:p14="http://schemas.microsoft.com/office/powerpoint/2010/main" val="572345178"/>
+        <p14:creationId xmlns:p14="http://schemas.microsoft.com/office/powerpoint/2010/main" val="3611983132"/>
       </p:ext>
     </p:extLst>
   </p:cSld>
@@ -1658,7 +1658,7 @@
           <p:cNvPr id="2" name="タイトル 1">
             <a:extLst>
               <a:ext uri="{FF2B5EF4-FFF2-40B4-BE49-F238E27FC236}">
-                <a16:creationId xmlns:a16="http://schemas.microsoft.com/office/drawing/2014/main" id="{835AE925-A549-09AD-6DC0-20B27CE29987}"/>
+                <a16:creationId xmlns:a16="http://schemas.microsoft.com/office/drawing/2014/main" id="{C6216966-87BD-A4C2-B294-0BDBB13F8E9D}"/>
               </a:ext>
             </a:extLst>
           </p:cNvPr>
@@ -1691,7 +1691,7 @@
           <p:cNvPr id="3" name="テキスト プレースホルダー 2">
             <a:extLst>
               <a:ext uri="{FF2B5EF4-FFF2-40B4-BE49-F238E27FC236}">
-                <a16:creationId xmlns:a16="http://schemas.microsoft.com/office/drawing/2014/main" id="{47A3F3DD-D031-03DA-F365-7CE08158127C}"/>
+                <a16:creationId xmlns:a16="http://schemas.microsoft.com/office/drawing/2014/main" id="{A20683A2-9F3E-2E53-F2B1-93A4E259E00B}"/>
               </a:ext>
             </a:extLst>
           </p:cNvPr>
@@ -1762,7 +1762,7 @@
           <p:cNvPr id="4" name="コンテンツ プレースホルダー 3">
             <a:extLst>
               <a:ext uri="{FF2B5EF4-FFF2-40B4-BE49-F238E27FC236}">
-                <a16:creationId xmlns:a16="http://schemas.microsoft.com/office/drawing/2014/main" id="{5B43DED2-B671-E2DA-A2FD-04D03F82447F}"/>
+                <a16:creationId xmlns:a16="http://schemas.microsoft.com/office/drawing/2014/main" id="{2C48FE44-3553-92B3-2E6D-0CEF94704B20}"/>
               </a:ext>
             </a:extLst>
           </p:cNvPr>
@@ -1856,7 +1856,7 @@
           <p:cNvPr id="5" name="テキスト プレースホルダー 4">
             <a:extLst>
               <a:ext uri="{FF2B5EF4-FFF2-40B4-BE49-F238E27FC236}">
-                <a16:creationId xmlns:a16="http://schemas.microsoft.com/office/drawing/2014/main" id="{6EAA981F-1421-F052-A77C-7300D888DF3C}"/>
+                <a16:creationId xmlns:a16="http://schemas.microsoft.com/office/drawing/2014/main" id="{9BA4A225-1470-CA97-9068-BDE13CE083DC}"/>
               </a:ext>
             </a:extLst>
           </p:cNvPr>
@@ -1927,7 +1927,7 @@
           <p:cNvPr id="6" name="コンテンツ プレースホルダー 5">
             <a:extLst>
               <a:ext uri="{FF2B5EF4-FFF2-40B4-BE49-F238E27FC236}">
-                <a16:creationId xmlns:a16="http://schemas.microsoft.com/office/drawing/2014/main" id="{78B073FA-D106-F2F1-D5C1-A527D5E0905F}"/>
+                <a16:creationId xmlns:a16="http://schemas.microsoft.com/office/drawing/2014/main" id="{C2A2394D-A13F-ECAD-D7D0-A0AFBF294FCE}"/>
               </a:ext>
             </a:extLst>
           </p:cNvPr>
@@ -2021,7 +2021,7 @@
           <p:cNvPr id="7" name="日付プレースホルダー 6">
             <a:extLst>
               <a:ext uri="{FF2B5EF4-FFF2-40B4-BE49-F238E27FC236}">
-                <a16:creationId xmlns:a16="http://schemas.microsoft.com/office/drawing/2014/main" id="{DFAE8F25-9BEF-2692-C98F-1967AD0DC73C}"/>
+                <a16:creationId xmlns:a16="http://schemas.microsoft.com/office/drawing/2014/main" id="{9C57CAFD-690C-95B3-D97A-A15C9D161930}"/>
               </a:ext>
             </a:extLst>
           </p:cNvPr>
@@ -2037,7 +2037,7 @@
           <a:bodyPr/>
           <a:lstStyle/>
           <a:p>
-            <a:fld id="{CBFDAB16-53B6-4EF0-B478-06DEEBE0E714}" type="datetimeFigureOut">
+            <a:fld id="{2703F04C-E76C-4633-818E-73CD24F44AAC}" type="datetimeFigureOut">
               <a:rPr kumimoji="1" lang="ja-JP" altLang="en-US" smtClean="0"/>
               <a:t>2026/7/30</a:t>
             </a:fld>
@@ -2050,7 +2050,7 @@
           <p:cNvPr id="8" name="フッター プレースホルダー 7">
             <a:extLst>
               <a:ext uri="{FF2B5EF4-FFF2-40B4-BE49-F238E27FC236}">
-                <a16:creationId xmlns:a16="http://schemas.microsoft.com/office/drawing/2014/main" id="{FC358056-85AC-28F5-BB1F-D3922EBDFFE8}"/>
+                <a16:creationId xmlns:a16="http://schemas.microsoft.com/office/drawing/2014/main" id="{E3F8A186-CBC3-ABD0-5688-2BC89F465662}"/>
               </a:ext>
             </a:extLst>
           </p:cNvPr>
@@ -2075,7 +2075,7 @@
           <p:cNvPr id="9" name="スライド番号プレースホルダー 8">
             <a:extLst>
               <a:ext uri="{FF2B5EF4-FFF2-40B4-BE49-F238E27FC236}">
-                <a16:creationId xmlns:a16="http://schemas.microsoft.com/office/drawing/2014/main" id="{02791E9E-622D-3F81-1DB3-236A72A04016}"/>
+                <a16:creationId xmlns:a16="http://schemas.microsoft.com/office/drawing/2014/main" id="{4890F0C7-3054-6852-4598-7F1EB02CAC71}"/>
               </a:ext>
             </a:extLst>
           </p:cNvPr>
@@ -2091,7 +2091,7 @@
           <a:bodyPr/>
           <a:lstStyle/>
           <a:p>
-            <a:fld id="{8E9CB072-4314-46FB-B7F3-661D33354668}" type="slidenum">
+            <a:fld id="{B10103F1-F9BE-4943-ACF2-437C6ECA534A}" type="slidenum">
               <a:rPr kumimoji="1" lang="ja-JP" altLang="en-US" smtClean="0"/>
               <a:t>‹#›</a:t>
             </a:fld>
@@ -2102,7 +2102,7 @@
     </p:spTree>
     <p:extLst>
       <p:ext uri="{BB962C8B-B14F-4D97-AF65-F5344CB8AC3E}">
-        <p14:creationId xmlns:p14="http://schemas.microsoft.com/office/powerpoint/2010/main" val="4077249943"/>
+        <p14:creationId xmlns:p14="http://schemas.microsoft.com/office/powerpoint/2010/main" val="519772657"/>
       </p:ext>
     </p:extLst>
   </p:cSld>
@@ -2134,7 +2134,7 @@
           <p:cNvPr id="2" name="タイトル 1">
             <a:extLst>
               <a:ext uri="{FF2B5EF4-FFF2-40B4-BE49-F238E27FC236}">
-                <a16:creationId xmlns:a16="http://schemas.microsoft.com/office/drawing/2014/main" id="{FAD439FF-28C0-B088-9678-EC8E2A727CA0}"/>
+                <a16:creationId xmlns:a16="http://schemas.microsoft.com/office/drawing/2014/main" id="{E2158A02-B5D1-B176-0EDB-892F6BA477E8}"/>
               </a:ext>
             </a:extLst>
           </p:cNvPr>
@@ -2162,7 +2162,7 @@
           <p:cNvPr id="3" name="日付プレースホルダー 2">
             <a:extLst>
               <a:ext uri="{FF2B5EF4-FFF2-40B4-BE49-F238E27FC236}">
-                <a16:creationId xmlns:a16="http://schemas.microsoft.com/office/drawing/2014/main" id="{C2292232-1680-E38F-3894-1A7CB32A2823}"/>
+                <a16:creationId xmlns:a16="http://schemas.microsoft.com/office/drawing/2014/main" id="{8F334ACD-AF6F-B1EF-92DA-2D80C78BC186}"/>
               </a:ext>
             </a:extLst>
           </p:cNvPr>
@@ -2178,7 +2178,7 @@
           <a:bodyPr/>
           <a:lstStyle/>
           <a:p>
-            <a:fld id="{CBFDAB16-53B6-4EF0-B478-06DEEBE0E714}" type="datetimeFigureOut">
+            <a:fld id="{2703F04C-E76C-4633-818E-73CD24F44AAC}" type="datetimeFigureOut">
               <a:rPr kumimoji="1" lang="ja-JP" altLang="en-US" smtClean="0"/>
               <a:t>2026/7/30</a:t>
             </a:fld>
@@ -2191,7 +2191,7 @@
           <p:cNvPr id="4" name="フッター プレースホルダー 3">
             <a:extLst>
               <a:ext uri="{FF2B5EF4-FFF2-40B4-BE49-F238E27FC236}">
-                <a16:creationId xmlns:a16="http://schemas.microsoft.com/office/drawing/2014/main" id="{D60969C5-52FA-B474-E9F8-29671909B139}"/>
+                <a16:creationId xmlns:a16="http://schemas.microsoft.com/office/drawing/2014/main" id="{F621488F-3DDB-FAAF-A930-6F7BDC5BD9D7}"/>
               </a:ext>
             </a:extLst>
           </p:cNvPr>
@@ -2216,7 +2216,7 @@
           <p:cNvPr id="5" name="スライド番号プレースホルダー 4">
             <a:extLst>
               <a:ext uri="{FF2B5EF4-FFF2-40B4-BE49-F238E27FC236}">
-                <a16:creationId xmlns:a16="http://schemas.microsoft.com/office/drawing/2014/main" id="{A7495675-35C5-8F1F-BB09-B738D6B7AD2D}"/>
+                <a16:creationId xmlns:a16="http://schemas.microsoft.com/office/drawing/2014/main" id="{55C40710-09E3-22B4-99D7-A2736CA7B328}"/>
               </a:ext>
             </a:extLst>
           </p:cNvPr>
@@ -2232,7 +2232,7 @@
           <a:bodyPr/>
           <a:lstStyle/>
           <a:p>
-            <a:fld id="{8E9CB072-4314-46FB-B7F3-661D33354668}" type="slidenum">
+            <a:fld id="{B10103F1-F9BE-4943-ACF2-437C6ECA534A}" type="slidenum">
               <a:rPr kumimoji="1" lang="ja-JP" altLang="en-US" smtClean="0"/>
               <a:t>‹#›</a:t>
             </a:fld>
@@ -2243,7 +2243,7 @@
     </p:spTree>
     <p:extLst>
       <p:ext uri="{BB962C8B-B14F-4D97-AF65-F5344CB8AC3E}">
-        <p14:creationId xmlns:p14="http://schemas.microsoft.com/office/powerpoint/2010/main" val="3489252756"/>
+        <p14:creationId xmlns:p14="http://schemas.microsoft.com/office/powerpoint/2010/main" val="1839375996"/>
       </p:ext>
     </p:extLst>
   </p:cSld>
@@ -2275,7 +2275,7 @@
           <p:cNvPr id="2" name="日付プレースホルダー 1">
             <a:extLst>
               <a:ext uri="{FF2B5EF4-FFF2-40B4-BE49-F238E27FC236}">
-                <a16:creationId xmlns:a16="http://schemas.microsoft.com/office/drawing/2014/main" id="{EB0FB53A-28BB-8FE7-C11C-8F78D424BBBF}"/>
+                <a16:creationId xmlns:a16="http://schemas.microsoft.com/office/drawing/2014/main" id="{59E56286-E8BF-24D3-BEC8-5C82A56ACCB0}"/>
               </a:ext>
             </a:extLst>
           </p:cNvPr>
@@ -2291,7 +2291,7 @@
           <a:bodyPr/>
           <a:lstStyle/>
           <a:p>
-            <a:fld id="{CBFDAB16-53B6-4EF0-B478-06DEEBE0E714}" type="datetimeFigureOut">
+            <a:fld id="{2703F04C-E76C-4633-818E-73CD24F44AAC}" type="datetimeFigureOut">
               <a:rPr kumimoji="1" lang="ja-JP" altLang="en-US" smtClean="0"/>
               <a:t>2026/7/30</a:t>
             </a:fld>
@@ -2304,7 +2304,7 @@
           <p:cNvPr id="3" name="フッター プレースホルダー 2">
             <a:extLst>
               <a:ext uri="{FF2B5EF4-FFF2-40B4-BE49-F238E27FC236}">
-                <a16:creationId xmlns:a16="http://schemas.microsoft.com/office/drawing/2014/main" id="{DF9A4692-11BB-D70E-98A3-64D8C5DAC24B}"/>
+                <a16:creationId xmlns:a16="http://schemas.microsoft.com/office/drawing/2014/main" id="{44138E83-854A-6EDA-07BC-C5268A0403A5}"/>
               </a:ext>
             </a:extLst>
           </p:cNvPr>
@@ -2329,7 +2329,7 @@
           <p:cNvPr id="4" name="スライド番号プレースホルダー 3">
             <a:extLst>
               <a:ext uri="{FF2B5EF4-FFF2-40B4-BE49-F238E27FC236}">
-                <a16:creationId xmlns:a16="http://schemas.microsoft.com/office/drawing/2014/main" id="{73F1FB4A-5332-85C6-DE58-596413A61C10}"/>
+                <a16:creationId xmlns:a16="http://schemas.microsoft.com/office/drawing/2014/main" id="{58EA0C19-BE16-6391-6254-0D2E86488CB9}"/>
               </a:ext>
             </a:extLst>
           </p:cNvPr>
@@ -2345,7 +2345,7 @@
           <a:bodyPr/>
           <a:lstStyle/>
           <a:p>
-            <a:fld id="{8E9CB072-4314-46FB-B7F3-661D33354668}" type="slidenum">
+            <a:fld id="{B10103F1-F9BE-4943-ACF2-437C6ECA534A}" type="slidenum">
               <a:rPr kumimoji="1" lang="ja-JP" altLang="en-US" smtClean="0"/>
               <a:t>‹#›</a:t>
             </a:fld>
@@ -2356,7 +2356,7 @@
     </p:spTree>
     <p:extLst>
       <p:ext uri="{BB962C8B-B14F-4D97-AF65-F5344CB8AC3E}">
-        <p14:creationId xmlns:p14="http://schemas.microsoft.com/office/powerpoint/2010/main" val="2545264069"/>
+        <p14:creationId xmlns:p14="http://schemas.microsoft.com/office/powerpoint/2010/main" val="1615972282"/>
       </p:ext>
     </p:extLst>
   </p:cSld>
@@ -2388,7 +2388,7 @@
           <p:cNvPr id="2" name="タイトル 1">
             <a:extLst>
               <a:ext uri="{FF2B5EF4-FFF2-40B4-BE49-F238E27FC236}">
-                <a16:creationId xmlns:a16="http://schemas.microsoft.com/office/drawing/2014/main" id="{AE13FD1D-E58E-B5C5-238A-F0E81D93520F}"/>
+                <a16:creationId xmlns:a16="http://schemas.microsoft.com/office/drawing/2014/main" id="{CCEF4BCF-41E2-3F1D-445B-03690E0B2500}"/>
               </a:ext>
             </a:extLst>
           </p:cNvPr>
@@ -2425,7 +2425,7 @@
           <p:cNvPr id="3" name="コンテンツ プレースホルダー 2">
             <a:extLst>
               <a:ext uri="{FF2B5EF4-FFF2-40B4-BE49-F238E27FC236}">
-                <a16:creationId xmlns:a16="http://schemas.microsoft.com/office/drawing/2014/main" id="{6BD4ABD7-F49B-2832-FABD-C9A844C25620}"/>
+                <a16:creationId xmlns:a16="http://schemas.microsoft.com/office/drawing/2014/main" id="{3EBB5584-5E53-BFCD-BA6D-D0A5C4FAA278}"/>
               </a:ext>
             </a:extLst>
           </p:cNvPr>
@@ -2547,7 +2547,7 @@
           <p:cNvPr id="4" name="テキスト プレースホルダー 3">
             <a:extLst>
               <a:ext uri="{FF2B5EF4-FFF2-40B4-BE49-F238E27FC236}">
-                <a16:creationId xmlns:a16="http://schemas.microsoft.com/office/drawing/2014/main" id="{CC806031-B9C5-C3B7-38B3-B82C1AD0EFB3}"/>
+                <a16:creationId xmlns:a16="http://schemas.microsoft.com/office/drawing/2014/main" id="{9134E672-88C5-FD36-0B95-89ACD42241A0}"/>
               </a:ext>
             </a:extLst>
           </p:cNvPr>
@@ -2618,7 +2618,7 @@
           <p:cNvPr id="5" name="日付プレースホルダー 4">
             <a:extLst>
               <a:ext uri="{FF2B5EF4-FFF2-40B4-BE49-F238E27FC236}">
-                <a16:creationId xmlns:a16="http://schemas.microsoft.com/office/drawing/2014/main" id="{F57E2992-02F3-D0F5-E4C8-75A3F80C3DFB}"/>
+                <a16:creationId xmlns:a16="http://schemas.microsoft.com/office/drawing/2014/main" id="{0D448459-60BF-2187-28B3-6C9F1A43412A}"/>
               </a:ext>
             </a:extLst>
           </p:cNvPr>
@@ -2634,7 +2634,7 @@
           <a:bodyPr/>
           <a:lstStyle/>
           <a:p>
-            <a:fld id="{CBFDAB16-53B6-4EF0-B478-06DEEBE0E714}" type="datetimeFigureOut">
+            <a:fld id="{2703F04C-E76C-4633-818E-73CD24F44AAC}" type="datetimeFigureOut">
               <a:rPr kumimoji="1" lang="ja-JP" altLang="en-US" smtClean="0"/>
               <a:t>2026/7/30</a:t>
             </a:fld>
@@ -2647,7 +2647,7 @@
           <p:cNvPr id="6" name="フッター プレースホルダー 5">
             <a:extLst>
               <a:ext uri="{FF2B5EF4-FFF2-40B4-BE49-F238E27FC236}">
-                <a16:creationId xmlns:a16="http://schemas.microsoft.com/office/drawing/2014/main" id="{8D63107F-D27C-6071-8B0E-A826213BD026}"/>
+                <a16:creationId xmlns:a16="http://schemas.microsoft.com/office/drawing/2014/main" id="{5A3065E7-1735-ED36-1BBF-DA8428DE1995}"/>
               </a:ext>
             </a:extLst>
           </p:cNvPr>
@@ -2672,7 +2672,7 @@
           <p:cNvPr id="7" name="スライド番号プレースホルダー 6">
             <a:extLst>
               <a:ext uri="{FF2B5EF4-FFF2-40B4-BE49-F238E27FC236}">
-                <a16:creationId xmlns:a16="http://schemas.microsoft.com/office/drawing/2014/main" id="{97E4CAE6-3803-19E2-4B5E-91C3A8713A0D}"/>
+                <a16:creationId xmlns:a16="http://schemas.microsoft.com/office/drawing/2014/main" id="{20462C76-6EF0-C9DB-D83F-8D5DD113E86E}"/>
               </a:ext>
             </a:extLst>
           </p:cNvPr>
@@ -2688,7 +2688,7 @@
           <a:bodyPr/>
           <a:lstStyle/>
           <a:p>
-            <a:fld id="{8E9CB072-4314-46FB-B7F3-661D33354668}" type="slidenum">
+            <a:fld id="{B10103F1-F9BE-4943-ACF2-437C6ECA534A}" type="slidenum">
               <a:rPr kumimoji="1" lang="ja-JP" altLang="en-US" smtClean="0"/>
               <a:t>‹#›</a:t>
             </a:fld>
@@ -2699,7 +2699,7 @@
     </p:spTree>
     <p:extLst>
       <p:ext uri="{BB962C8B-B14F-4D97-AF65-F5344CB8AC3E}">
-        <p14:creationId xmlns:p14="http://schemas.microsoft.com/office/powerpoint/2010/main" val="3670707398"/>
+        <p14:creationId xmlns:p14="http://schemas.microsoft.com/office/powerpoint/2010/main" val="3065160349"/>
       </p:ext>
     </p:extLst>
   </p:cSld>
@@ -2731,7 +2731,7 @@
           <p:cNvPr id="2" name="タイトル 1">
             <a:extLst>
               <a:ext uri="{FF2B5EF4-FFF2-40B4-BE49-F238E27FC236}">
-                <a16:creationId xmlns:a16="http://schemas.microsoft.com/office/drawing/2014/main" id="{9D6EC7EB-BACB-6E59-3370-F202DA16D945}"/>
+                <a16:creationId xmlns:a16="http://schemas.microsoft.com/office/drawing/2014/main" id="{AE0FBFDB-CCEF-2704-B4D1-929B6B836C13}"/>
               </a:ext>
             </a:extLst>
           </p:cNvPr>
@@ -2768,7 +2768,7 @@
           <p:cNvPr id="3" name="図プレースホルダー 2">
             <a:extLst>
               <a:ext uri="{FF2B5EF4-FFF2-40B4-BE49-F238E27FC236}">
-                <a16:creationId xmlns:a16="http://schemas.microsoft.com/office/drawing/2014/main" id="{B524109E-6934-AEDA-8E36-AEEB913D7D66}"/>
+                <a16:creationId xmlns:a16="http://schemas.microsoft.com/office/drawing/2014/main" id="{7DEBAFFA-2212-C625-4F09-D83D4EE61196}"/>
               </a:ext>
             </a:extLst>
           </p:cNvPr>
@@ -2835,7 +2835,7 @@
           <p:cNvPr id="4" name="テキスト プレースホルダー 3">
             <a:extLst>
               <a:ext uri="{FF2B5EF4-FFF2-40B4-BE49-F238E27FC236}">
-                <a16:creationId xmlns:a16="http://schemas.microsoft.com/office/drawing/2014/main" id="{A5CF8D9B-8AFF-F20C-4CDE-BDD7991C7109}"/>
+                <a16:creationId xmlns:a16="http://schemas.microsoft.com/office/drawing/2014/main" id="{AF75BC34-0622-626D-6238-F0FD161A4724}"/>
               </a:ext>
             </a:extLst>
           </p:cNvPr>
@@ -2906,7 +2906,7 @@
           <p:cNvPr id="5" name="日付プレースホルダー 4">
             <a:extLst>
               <a:ext uri="{FF2B5EF4-FFF2-40B4-BE49-F238E27FC236}">
-                <a16:creationId xmlns:a16="http://schemas.microsoft.com/office/drawing/2014/main" id="{280F9454-E1D0-AB0A-3E2B-1C46CC7C25E0}"/>
+                <a16:creationId xmlns:a16="http://schemas.microsoft.com/office/drawing/2014/main" id="{41080123-A5D4-5374-9A8E-3AD6E1D39DED}"/>
               </a:ext>
             </a:extLst>
           </p:cNvPr>
@@ -2922,7 +2922,7 @@
           <a:bodyPr/>
           <a:lstStyle/>
           <a:p>
-            <a:fld id="{CBFDAB16-53B6-4EF0-B478-06DEEBE0E714}" type="datetimeFigureOut">
+            <a:fld id="{2703F04C-E76C-4633-818E-73CD24F44AAC}" type="datetimeFigureOut">
               <a:rPr kumimoji="1" lang="ja-JP" altLang="en-US" smtClean="0"/>
               <a:t>2026/7/30</a:t>
             </a:fld>
@@ -2935,7 +2935,7 @@
           <p:cNvPr id="6" name="フッター プレースホルダー 5">
             <a:extLst>
               <a:ext uri="{FF2B5EF4-FFF2-40B4-BE49-F238E27FC236}">
-                <a16:creationId xmlns:a16="http://schemas.microsoft.com/office/drawing/2014/main" id="{30E09C54-0304-1C0E-DCC2-ADE657C4EBEE}"/>
+                <a16:creationId xmlns:a16="http://schemas.microsoft.com/office/drawing/2014/main" id="{4B2E457A-0F4B-A0F8-D4FF-CF54B43CF89C}"/>
               </a:ext>
             </a:extLst>
           </p:cNvPr>
@@ -2960,7 +2960,7 @@
           <p:cNvPr id="7" name="スライド番号プレースホルダー 6">
             <a:extLst>
               <a:ext uri="{FF2B5EF4-FFF2-40B4-BE49-F238E27FC236}">
-                <a16:creationId xmlns:a16="http://schemas.microsoft.com/office/drawing/2014/main" id="{645520B8-3CAB-7FF9-016E-28A9CD5FDE2B}"/>
+                <a16:creationId xmlns:a16="http://schemas.microsoft.com/office/drawing/2014/main" id="{697D0DAB-17B6-ED57-ED4C-B182801B507D}"/>
               </a:ext>
             </a:extLst>
           </p:cNvPr>
@@ -2976,7 +2976,7 @@
           <a:bodyPr/>
           <a:lstStyle/>
           <a:p>
-            <a:fld id="{8E9CB072-4314-46FB-B7F3-661D33354668}" type="slidenum">
+            <a:fld id="{B10103F1-F9BE-4943-ACF2-437C6ECA534A}" type="slidenum">
               <a:rPr kumimoji="1" lang="ja-JP" altLang="en-US" smtClean="0"/>
               <a:t>‹#›</a:t>
             </a:fld>
@@ -2987,7 +2987,7 @@
     </p:spTree>
     <p:extLst>
       <p:ext uri="{BB962C8B-B14F-4D97-AF65-F5344CB8AC3E}">
-        <p14:creationId xmlns:p14="http://schemas.microsoft.com/office/powerpoint/2010/main" val="1530066843"/>
+        <p14:creationId xmlns:p14="http://schemas.microsoft.com/office/powerpoint/2010/main" val="1407433641"/>
       </p:ext>
     </p:extLst>
   </p:cSld>
@@ -3024,7 +3024,7 @@
           <p:cNvPr id="2" name="タイトル プレースホルダー 1">
             <a:extLst>
               <a:ext uri="{FF2B5EF4-FFF2-40B4-BE49-F238E27FC236}">
-                <a16:creationId xmlns:a16="http://schemas.microsoft.com/office/drawing/2014/main" id="{48953A5C-263C-7596-5A3F-FCE8F56B6DE2}"/>
+                <a16:creationId xmlns:a16="http://schemas.microsoft.com/office/drawing/2014/main" id="{89940082-8AF5-5DB9-97D5-ABA2537640EE}"/>
               </a:ext>
             </a:extLst>
           </p:cNvPr>
@@ -3062,7 +3062,7 @@
           <p:cNvPr id="3" name="テキスト プレースホルダー 2">
             <a:extLst>
               <a:ext uri="{FF2B5EF4-FFF2-40B4-BE49-F238E27FC236}">
-                <a16:creationId xmlns:a16="http://schemas.microsoft.com/office/drawing/2014/main" id="{3F014503-0158-9CB9-5F2A-E37AA42FA8A1}"/>
+                <a16:creationId xmlns:a16="http://schemas.microsoft.com/office/drawing/2014/main" id="{C9D6998C-B201-26AC-A5FB-B6EB2ED0723B}"/>
               </a:ext>
             </a:extLst>
           </p:cNvPr>
@@ -3161,7 +3161,7 @@
           <p:cNvPr id="4" name="日付プレースホルダー 3">
             <a:extLst>
               <a:ext uri="{FF2B5EF4-FFF2-40B4-BE49-F238E27FC236}">
-                <a16:creationId xmlns:a16="http://schemas.microsoft.com/office/drawing/2014/main" id="{808E072E-5C1D-9B30-C01A-C4416A754C7D}"/>
+                <a16:creationId xmlns:a16="http://schemas.microsoft.com/office/drawing/2014/main" id="{F8E37287-26B3-6FC8-21BB-B4B096664989}"/>
               </a:ext>
             </a:extLst>
           </p:cNvPr>
@@ -3195,7 +3195,7 @@
             </a:lvl1pPr>
           </a:lstStyle>
           <a:p>
-            <a:fld id="{CBFDAB16-53B6-4EF0-B478-06DEEBE0E714}" type="datetimeFigureOut">
+            <a:fld id="{2703F04C-E76C-4633-818E-73CD24F44AAC}" type="datetimeFigureOut">
               <a:rPr kumimoji="1" lang="ja-JP" altLang="en-US" smtClean="0"/>
               <a:t>2026/7/30</a:t>
             </a:fld>
@@ -3208,7 +3208,7 @@
           <p:cNvPr id="5" name="フッター プレースホルダー 4">
             <a:extLst>
               <a:ext uri="{FF2B5EF4-FFF2-40B4-BE49-F238E27FC236}">
-                <a16:creationId xmlns:a16="http://schemas.microsoft.com/office/drawing/2014/main" id="{9211FE39-564C-B101-37F5-57ADBD7CA3A6}"/>
+                <a16:creationId xmlns:a16="http://schemas.microsoft.com/office/drawing/2014/main" id="{E95CEAFD-CECB-31E8-C1E5-D86F89BEFD81}"/>
               </a:ext>
             </a:extLst>
           </p:cNvPr>
@@ -3251,7 +3251,7 @@
           <p:cNvPr id="6" name="スライド番号プレースホルダー 5">
             <a:extLst>
               <a:ext uri="{FF2B5EF4-FFF2-40B4-BE49-F238E27FC236}">
-                <a16:creationId xmlns:a16="http://schemas.microsoft.com/office/drawing/2014/main" id="{FDB71DB1-21A3-F3DA-124D-0D3837D41C66}"/>
+                <a16:creationId xmlns:a16="http://schemas.microsoft.com/office/drawing/2014/main" id="{177220D8-F472-9BA4-AFDD-CE22F26FB5A2}"/>
               </a:ext>
             </a:extLst>
           </p:cNvPr>
@@ -3285,7 +3285,7 @@
             </a:lvl1pPr>
           </a:lstStyle>
           <a:p>
-            <a:fld id="{8E9CB072-4314-46FB-B7F3-661D33354668}" type="slidenum">
+            <a:fld id="{B10103F1-F9BE-4943-ACF2-437C6ECA534A}" type="slidenum">
               <a:rPr kumimoji="1" lang="ja-JP" altLang="en-US" smtClean="0"/>
               <a:t>‹#›</a:t>
             </a:fld>
@@ -3296,7 +3296,7 @@
     </p:spTree>
     <p:extLst>
       <p:ext uri="{BB962C8B-B14F-4D97-AF65-F5344CB8AC3E}">
-        <p14:creationId xmlns:p14="http://schemas.microsoft.com/office/powerpoint/2010/main" val="442756311"/>
+        <p14:creationId xmlns:p14="http://schemas.microsoft.com/office/powerpoint/2010/main" val="3775140998"/>
       </p:ext>
     </p:extLst>
   </p:cSld>
@@ -3619,7 +3619,7 @@
           <p:cNvPr id="2" name="テキスト ボックス 1">
             <a:extLst>
               <a:ext uri="{FF2B5EF4-FFF2-40B4-BE49-F238E27FC236}">
-                <a16:creationId xmlns:a16="http://schemas.microsoft.com/office/drawing/2014/main" id="{EB5A2FE9-A903-E668-3F82-20FDA3EB39E0}"/>
+                <a16:creationId xmlns:a16="http://schemas.microsoft.com/office/drawing/2014/main" id="{888829C2-8A85-73BD-4584-37E4B7936AF9}"/>
               </a:ext>
             </a:extLst>
           </p:cNvPr>
@@ -3665,7 +3665,7 @@
           <p:cNvPr id="3" name="テキスト ボックス 2">
             <a:extLst>
               <a:ext uri="{FF2B5EF4-FFF2-40B4-BE49-F238E27FC236}">
-                <a16:creationId xmlns:a16="http://schemas.microsoft.com/office/drawing/2014/main" id="{0200E3A4-FB70-EBD5-77B6-39FDF9762857}"/>
+                <a16:creationId xmlns:a16="http://schemas.microsoft.com/office/drawing/2014/main" id="{8E8BBEF3-C8ED-6D46-E8C6-AD1ACF9666FF}"/>
               </a:ext>
             </a:extLst>
           </p:cNvPr>
@@ -3714,7 +3714,7 @@
           <p:cNvPr id="4" name="テキスト ボックス 3">
             <a:extLst>
               <a:ext uri="{FF2B5EF4-FFF2-40B4-BE49-F238E27FC236}">
-                <a16:creationId xmlns:a16="http://schemas.microsoft.com/office/drawing/2014/main" id="{760275F0-E1B2-88CA-A402-7F406BD2E447}"/>
+                <a16:creationId xmlns:a16="http://schemas.microsoft.com/office/drawing/2014/main" id="{AF31283F-65B6-909E-7D00-699DF71DBE3E}"/>
               </a:ext>
             </a:extLst>
           </p:cNvPr>
@@ -3754,7 +3754,7 @@
           <p:cNvPr id="5" name="テキスト ボックス 4">
             <a:extLst>
               <a:ext uri="{FF2B5EF4-FFF2-40B4-BE49-F238E27FC236}">
-                <a16:creationId xmlns:a16="http://schemas.microsoft.com/office/drawing/2014/main" id="{B4F2FFA5-C1B4-AE8A-D251-35FD88B01C35}"/>
+                <a16:creationId xmlns:a16="http://schemas.microsoft.com/office/drawing/2014/main" id="{FA48FB93-731C-D9D7-5135-275659AB7E4C}"/>
               </a:ext>
             </a:extLst>
           </p:cNvPr>
@@ -3801,7 +3801,7 @@
             <a:hlinkClick r:id="" action="ppaction://media"/>
             <a:extLst>
               <a:ext uri="{FF2B5EF4-FFF2-40B4-BE49-F238E27FC236}">
-                <a16:creationId xmlns:a16="http://schemas.microsoft.com/office/drawing/2014/main" id="{3F8B801F-C06D-AF75-8390-0ACD3C9C4968}"/>
+                <a16:creationId xmlns:a16="http://schemas.microsoft.com/office/drawing/2014/main" id="{9D35AC49-CD59-2971-100E-CB461A8D6EF6}"/>
               </a:ext>
             </a:extLst>
           </p:cNvPr>
@@ -3836,7 +3836,7 @@
     </p:spTree>
     <p:extLst>
       <p:ext uri="{BB962C8B-B14F-4D97-AF65-F5344CB8AC3E}">
-        <p14:creationId xmlns:p14="http://schemas.microsoft.com/office/powerpoint/2010/main" val="4074024174"/>
+        <p14:creationId xmlns:p14="http://schemas.microsoft.com/office/powerpoint/2010/main" val="1132232005"/>
       </p:ext>
     </p:extLst>
   </p:cSld>
@@ -3960,7 +3960,7 @@
           <p:cNvPr id="2" name="テキスト ボックス 1">
             <a:extLst>
               <a:ext uri="{FF2B5EF4-FFF2-40B4-BE49-F238E27FC236}">
-                <a16:creationId xmlns:a16="http://schemas.microsoft.com/office/drawing/2014/main" id="{ADCFEE53-7590-DC3C-438E-E6473CA7A6C9}"/>
+                <a16:creationId xmlns:a16="http://schemas.microsoft.com/office/drawing/2014/main" id="{B74FA436-C1A6-CEB5-2F82-871B5877895A}"/>
               </a:ext>
             </a:extLst>
           </p:cNvPr>
@@ -4006,7 +4006,7 @@
           <p:cNvPr id="3" name="テキスト ボックス 2">
             <a:extLst>
               <a:ext uri="{FF2B5EF4-FFF2-40B4-BE49-F238E27FC236}">
-                <a16:creationId xmlns:a16="http://schemas.microsoft.com/office/drawing/2014/main" id="{DE001C21-9EBB-EE88-61C7-0F9F63C94647}"/>
+                <a16:creationId xmlns:a16="http://schemas.microsoft.com/office/drawing/2014/main" id="{5EED3DA1-20BC-7896-16FA-1A9237AD1A14}"/>
               </a:ext>
             </a:extLst>
           </p:cNvPr>
@@ -4046,7 +4046,7 @@
           <p:cNvPr id="4" name="テキスト ボックス 3">
             <a:extLst>
               <a:ext uri="{FF2B5EF4-FFF2-40B4-BE49-F238E27FC236}">
-                <a16:creationId xmlns:a16="http://schemas.microsoft.com/office/drawing/2014/main" id="{255D5091-B7A0-1907-6550-EAA43B9C32FA}"/>
+                <a16:creationId xmlns:a16="http://schemas.microsoft.com/office/drawing/2014/main" id="{96179610-7073-CCF2-3EAA-51FFDB9D0180}"/>
               </a:ext>
             </a:extLst>
           </p:cNvPr>
@@ -4128,7 +4128,7 @@
           <p:cNvPr id="5" name="テキスト ボックス 4">
             <a:extLst>
               <a:ext uri="{FF2B5EF4-FFF2-40B4-BE49-F238E27FC236}">
-                <a16:creationId xmlns:a16="http://schemas.microsoft.com/office/drawing/2014/main" id="{3304A3D5-EAC8-A8D9-9A61-1A7384AB5EA0}"/>
+                <a16:creationId xmlns:a16="http://schemas.microsoft.com/office/drawing/2014/main" id="{54E64234-F2B0-33A9-2AF4-3AEBBC31C542}"/>
               </a:ext>
             </a:extLst>
           </p:cNvPr>
@@ -4175,7 +4175,7 @@
             <a:hlinkClick r:id="" action="ppaction://media"/>
             <a:extLst>
               <a:ext uri="{FF2B5EF4-FFF2-40B4-BE49-F238E27FC236}">
-                <a16:creationId xmlns:a16="http://schemas.microsoft.com/office/drawing/2014/main" id="{83B66A16-16CF-99D3-D63A-369A65F98D03}"/>
+                <a16:creationId xmlns:a16="http://schemas.microsoft.com/office/drawing/2014/main" id="{750645C5-E6E0-38E8-4E5A-62FA32F9F35B}"/>
               </a:ext>
             </a:extLst>
           </p:cNvPr>
@@ -4210,7 +4210,7 @@
     </p:spTree>
     <p:extLst>
       <p:ext uri="{BB962C8B-B14F-4D97-AF65-F5344CB8AC3E}">
-        <p14:creationId xmlns:p14="http://schemas.microsoft.com/office/powerpoint/2010/main" val="3664113067"/>
+        <p14:creationId xmlns:p14="http://schemas.microsoft.com/office/powerpoint/2010/main" val="1910480879"/>
       </p:ext>
     </p:extLst>
   </p:cSld>
@@ -4334,7 +4334,7 @@
           <p:cNvPr id="2" name="テキスト ボックス 1">
             <a:extLst>
               <a:ext uri="{FF2B5EF4-FFF2-40B4-BE49-F238E27FC236}">
-                <a16:creationId xmlns:a16="http://schemas.microsoft.com/office/drawing/2014/main" id="{1D6E19B1-38AF-D371-7D33-706C79F8AFB2}"/>
+                <a16:creationId xmlns:a16="http://schemas.microsoft.com/office/drawing/2014/main" id="{0AEA907B-4E33-CB77-D04F-F572869065F7}"/>
               </a:ext>
             </a:extLst>
           </p:cNvPr>
@@ -4380,7 +4380,7 @@
           <p:cNvPr id="3" name="テキスト ボックス 2">
             <a:extLst>
               <a:ext uri="{FF2B5EF4-FFF2-40B4-BE49-F238E27FC236}">
-                <a16:creationId xmlns:a16="http://schemas.microsoft.com/office/drawing/2014/main" id="{22230EC8-E94C-DD44-4A80-EFC4D4377C46}"/>
+                <a16:creationId xmlns:a16="http://schemas.microsoft.com/office/drawing/2014/main" id="{7ED20223-4D94-86F1-CEBD-F5723AE98535}"/>
               </a:ext>
             </a:extLst>
           </p:cNvPr>
@@ -4420,7 +4420,7 @@
           <p:cNvPr id="4" name="テキスト ボックス 3">
             <a:extLst>
               <a:ext uri="{FF2B5EF4-FFF2-40B4-BE49-F238E27FC236}">
-                <a16:creationId xmlns:a16="http://schemas.microsoft.com/office/drawing/2014/main" id="{2DA27617-7733-ECA4-FF1E-175F7A9A89B5}"/>
+                <a16:creationId xmlns:a16="http://schemas.microsoft.com/office/drawing/2014/main" id="{AFEA6C79-A564-652B-176A-CE469D2A803E}"/>
               </a:ext>
             </a:extLst>
           </p:cNvPr>
@@ -4515,7 +4515,7 @@
           <p:cNvPr id="5" name="テキスト ボックス 4">
             <a:extLst>
               <a:ext uri="{FF2B5EF4-FFF2-40B4-BE49-F238E27FC236}">
-                <a16:creationId xmlns:a16="http://schemas.microsoft.com/office/drawing/2014/main" id="{BC54A168-F0B5-A59C-6DA3-4641B08F3940}"/>
+                <a16:creationId xmlns:a16="http://schemas.microsoft.com/office/drawing/2014/main" id="{C828BC47-0EBA-8E25-0265-FC3BE8E4DCD6}"/>
               </a:ext>
             </a:extLst>
           </p:cNvPr>
@@ -4562,7 +4562,7 @@
             <a:hlinkClick r:id="" action="ppaction://media"/>
             <a:extLst>
               <a:ext uri="{FF2B5EF4-FFF2-40B4-BE49-F238E27FC236}">
-                <a16:creationId xmlns:a16="http://schemas.microsoft.com/office/drawing/2014/main" id="{09778E96-A5FA-6BA4-16D8-F5915A67E655}"/>
+                <a16:creationId xmlns:a16="http://schemas.microsoft.com/office/drawing/2014/main" id="{0091F203-B589-BA04-B896-E1EEBC9297F1}"/>
               </a:ext>
             </a:extLst>
           </p:cNvPr>
@@ -4597,7 +4597,7 @@
     </p:spTree>
     <p:extLst>
       <p:ext uri="{BB962C8B-B14F-4D97-AF65-F5344CB8AC3E}">
-        <p14:creationId xmlns:p14="http://schemas.microsoft.com/office/powerpoint/2010/main" val="3216389115"/>
+        <p14:creationId xmlns:p14="http://schemas.microsoft.com/office/powerpoint/2010/main" val="2980125296"/>
       </p:ext>
     </p:extLst>
   </p:cSld>
@@ -4721,7 +4721,7 @@
           <p:cNvPr id="2" name="テキスト ボックス 1">
             <a:extLst>
               <a:ext uri="{FF2B5EF4-FFF2-40B4-BE49-F238E27FC236}">
-                <a16:creationId xmlns:a16="http://schemas.microsoft.com/office/drawing/2014/main" id="{593D29A1-7C09-7A04-BF68-885CD62344A9}"/>
+                <a16:creationId xmlns:a16="http://schemas.microsoft.com/office/drawing/2014/main" id="{32A5F5D1-6E62-E405-F9B0-76180EF8755D}"/>
               </a:ext>
             </a:extLst>
           </p:cNvPr>
@@ -4767,7 +4767,7 @@
           <p:cNvPr id="3" name="テキスト ボックス 2">
             <a:extLst>
               <a:ext uri="{FF2B5EF4-FFF2-40B4-BE49-F238E27FC236}">
-                <a16:creationId xmlns:a16="http://schemas.microsoft.com/office/drawing/2014/main" id="{470DC744-053A-791D-06D5-FEA39D1A9FE7}"/>
+                <a16:creationId xmlns:a16="http://schemas.microsoft.com/office/drawing/2014/main" id="{A82B6A8D-1BCD-16C0-95A1-5900A85C7EA4}"/>
               </a:ext>
             </a:extLst>
           </p:cNvPr>
@@ -4807,7 +4807,7 @@
           <p:cNvPr id="4" name="テキスト ボックス 3">
             <a:extLst>
               <a:ext uri="{FF2B5EF4-FFF2-40B4-BE49-F238E27FC236}">
-                <a16:creationId xmlns:a16="http://schemas.microsoft.com/office/drawing/2014/main" id="{754B8F1B-51B7-D1A5-14AB-83A2BD383126}"/>
+                <a16:creationId xmlns:a16="http://schemas.microsoft.com/office/drawing/2014/main" id="{EAC1CAB1-CF29-97E1-DC9F-0DEE757C1DF8}"/>
               </a:ext>
             </a:extLst>
           </p:cNvPr>
@@ -4917,7 +4917,7 @@
           <p:cNvPr id="5" name="テキスト ボックス 4">
             <a:extLst>
               <a:ext uri="{FF2B5EF4-FFF2-40B4-BE49-F238E27FC236}">
-                <a16:creationId xmlns:a16="http://schemas.microsoft.com/office/drawing/2014/main" id="{2CBE6388-2C71-1A5A-8249-A5CFE8FFC65E}"/>
+                <a16:creationId xmlns:a16="http://schemas.microsoft.com/office/drawing/2014/main" id="{CB094FA0-1FCC-1D97-8768-A58B9CAC27C3}"/>
               </a:ext>
             </a:extLst>
           </p:cNvPr>
@@ -4964,7 +4964,7 @@
             <a:hlinkClick r:id="" action="ppaction://media"/>
             <a:extLst>
               <a:ext uri="{FF2B5EF4-FFF2-40B4-BE49-F238E27FC236}">
-                <a16:creationId xmlns:a16="http://schemas.microsoft.com/office/drawing/2014/main" id="{39B148B7-526F-6654-E147-2BB4EBA4E86D}"/>
+                <a16:creationId xmlns:a16="http://schemas.microsoft.com/office/drawing/2014/main" id="{C3060849-30D8-D9D0-6950-330338C0AA31}"/>
               </a:ext>
             </a:extLst>
           </p:cNvPr>
@@ -4999,7 +4999,7 @@
     </p:spTree>
     <p:extLst>
       <p:ext uri="{BB962C8B-B14F-4D97-AF65-F5344CB8AC3E}">
-        <p14:creationId xmlns:p14="http://schemas.microsoft.com/office/powerpoint/2010/main" val="614598849"/>
+        <p14:creationId xmlns:p14="http://schemas.microsoft.com/office/powerpoint/2010/main" val="430376711"/>
       </p:ext>
     </p:extLst>
   </p:cSld>
@@ -5123,7 +5123,7 @@
           <p:cNvPr id="2" name="テキスト ボックス 1">
             <a:extLst>
               <a:ext uri="{FF2B5EF4-FFF2-40B4-BE49-F238E27FC236}">
-                <a16:creationId xmlns:a16="http://schemas.microsoft.com/office/drawing/2014/main" id="{2234E051-8090-1E6D-C6C3-FFAC864EF30A}"/>
+                <a16:creationId xmlns:a16="http://schemas.microsoft.com/office/drawing/2014/main" id="{97A82824-F372-29E6-17DA-D8DA42B7C3F6}"/>
               </a:ext>
             </a:extLst>
           </p:cNvPr>
@@ -5169,7 +5169,7 @@
           <p:cNvPr id="3" name="テキスト ボックス 2">
             <a:extLst>
               <a:ext uri="{FF2B5EF4-FFF2-40B4-BE49-F238E27FC236}">
-                <a16:creationId xmlns:a16="http://schemas.microsoft.com/office/drawing/2014/main" id="{B4598EF9-0E7E-5B0B-EDBC-5369A50F15FB}"/>
+                <a16:creationId xmlns:a16="http://schemas.microsoft.com/office/drawing/2014/main" id="{88467539-1668-C9A4-9C70-C071E3315ED9}"/>
               </a:ext>
             </a:extLst>
           </p:cNvPr>
@@ -5209,7 +5209,7 @@
           <p:cNvPr id="4" name="テキスト ボックス 3">
             <a:extLst>
               <a:ext uri="{FF2B5EF4-FFF2-40B4-BE49-F238E27FC236}">
-                <a16:creationId xmlns:a16="http://schemas.microsoft.com/office/drawing/2014/main" id="{8E5B1C88-D03E-C6EC-DCD2-C115A4F0E7D2}"/>
+                <a16:creationId xmlns:a16="http://schemas.microsoft.com/office/drawing/2014/main" id="{797A4661-ABF5-E2A2-8E67-A95FC0E8D2EF}"/>
               </a:ext>
             </a:extLst>
           </p:cNvPr>
@@ -5233,20 +5233,14 @@
           <a:lstStyle/>
           <a:p>
             <a:r>
-              <a:rPr kumimoji="1" lang="en-US" altLang="ja-JP" sz="2000">
+              <a:rPr kumimoji="1" lang="ja-JP" altLang="en-US" sz="2000">
                 <a:solidFill>
                   <a:srgbClr val="333333"/>
                 </a:solidFill>
                 <a:latin typeface="Arial" panose="020B0604020202020204" pitchFamily="34" charset="0"/>
               </a:rPr>
-              <a:t>Set confirmed custom domain</a:t>
-            </a:r>
-            <a:endParaRPr kumimoji="1" lang="ja-JP" altLang="en-US" sz="2000">
-              <a:solidFill>
-                <a:srgbClr val="333333"/>
-              </a:solidFill>
-              <a:latin typeface="Arial" panose="020B0604020202020204" pitchFamily="34" charset="0"/>
-            </a:endParaRPr>
+              <a:t>直近のコミットでは、実装の見直しと継続的な改善が行われました。</a:t>
+            </a:r>
           </a:p>
         </p:txBody>
       </p:sp>
@@ -5255,7 +5249,7 @@
           <p:cNvPr id="5" name="テキスト ボックス 4">
             <a:extLst>
               <a:ext uri="{FF2B5EF4-FFF2-40B4-BE49-F238E27FC236}">
-                <a16:creationId xmlns:a16="http://schemas.microsoft.com/office/drawing/2014/main" id="{97B13B28-AEB4-8A46-1608-3BFF99E591EE}"/>
+                <a16:creationId xmlns:a16="http://schemas.microsoft.com/office/drawing/2014/main" id="{02D8B80A-41F3-2CAE-1022-22828CA462D7}"/>
               </a:ext>
             </a:extLst>
           </p:cNvPr>
@@ -5302,7 +5296,7 @@
             <a:hlinkClick r:id="" action="ppaction://media"/>
             <a:extLst>
               <a:ext uri="{FF2B5EF4-FFF2-40B4-BE49-F238E27FC236}">
-                <a16:creationId xmlns:a16="http://schemas.microsoft.com/office/drawing/2014/main" id="{F5305B1A-23E7-B605-1050-33E87B1CB201}"/>
+                <a16:creationId xmlns:a16="http://schemas.microsoft.com/office/drawing/2014/main" id="{21DDD580-25B5-8A22-BADA-6E9146B1300B}"/>
               </a:ext>
             </a:extLst>
           </p:cNvPr>
@@ -5337,7 +5331,7 @@
     </p:spTree>
     <p:extLst>
       <p:ext uri="{BB962C8B-B14F-4D97-AF65-F5344CB8AC3E}">
-        <p14:creationId xmlns:p14="http://schemas.microsoft.com/office/powerpoint/2010/main" val="1835051491"/>
+        <p14:creationId xmlns:p14="http://schemas.microsoft.com/office/powerpoint/2010/main" val="1349054733"/>
       </p:ext>
     </p:extLst>
   </p:cSld>
@@ -5380,7 +5374,7 @@
                                   <p:childTnLst>
                                     <p:cmd type="call" cmd="playFrom(0.0)">
                                       <p:cBhvr>
-                                        <p:cTn id="6" dur="6451" fill="hold"/>
+                                        <p:cTn id="6" dur="6076" fill="hold"/>
                                         <p:tgtEl>
                                           <p:spTgt spid="6"/>
                                         </p:tgtEl>
@@ -5461,7 +5455,7 @@
           <p:cNvPr id="2" name="テキスト ボックス 1">
             <a:extLst>
               <a:ext uri="{FF2B5EF4-FFF2-40B4-BE49-F238E27FC236}">
-                <a16:creationId xmlns:a16="http://schemas.microsoft.com/office/drawing/2014/main" id="{6F111B6E-9167-6902-C9B2-66164EA257BE}"/>
+                <a16:creationId xmlns:a16="http://schemas.microsoft.com/office/drawing/2014/main" id="{6F243A2C-3716-EFB6-6361-506F02E6D564}"/>
               </a:ext>
             </a:extLst>
           </p:cNvPr>
@@ -5507,7 +5501,7 @@
           <p:cNvPr id="3" name="テキスト ボックス 2">
             <a:extLst>
               <a:ext uri="{FF2B5EF4-FFF2-40B4-BE49-F238E27FC236}">
-                <a16:creationId xmlns:a16="http://schemas.microsoft.com/office/drawing/2014/main" id="{D2A510BF-2F68-F735-6708-6693544D0720}"/>
+                <a16:creationId xmlns:a16="http://schemas.microsoft.com/office/drawing/2014/main" id="{CA2BEDCD-D950-2A1D-9D5F-A7C3E3D67719}"/>
               </a:ext>
             </a:extLst>
           </p:cNvPr>
@@ -5547,7 +5541,7 @@
           <p:cNvPr id="4" name="テキスト ボックス 3">
             <a:extLst>
               <a:ext uri="{FF2B5EF4-FFF2-40B4-BE49-F238E27FC236}">
-                <a16:creationId xmlns:a16="http://schemas.microsoft.com/office/drawing/2014/main" id="{6360DC07-3B3D-056F-9175-07C0E724D1F1}"/>
+                <a16:creationId xmlns:a16="http://schemas.microsoft.com/office/drawing/2014/main" id="{38DB7255-92F1-7592-B829-E6B6D89A9774}"/>
               </a:ext>
             </a:extLst>
           </p:cNvPr>
@@ -5612,7 +5606,7 @@
           <p:cNvPr id="5" name="テキスト ボックス 4">
             <a:extLst>
               <a:ext uri="{FF2B5EF4-FFF2-40B4-BE49-F238E27FC236}">
-                <a16:creationId xmlns:a16="http://schemas.microsoft.com/office/drawing/2014/main" id="{D593A3F1-5356-32B3-B031-8BA22E7C6356}"/>
+                <a16:creationId xmlns:a16="http://schemas.microsoft.com/office/drawing/2014/main" id="{7EB27FA2-17BF-96AF-5F54-A2BEE0FE7157}"/>
               </a:ext>
             </a:extLst>
           </p:cNvPr>
@@ -5659,7 +5653,7 @@
             <a:hlinkClick r:id="" action="ppaction://media"/>
             <a:extLst>
               <a:ext uri="{FF2B5EF4-FFF2-40B4-BE49-F238E27FC236}">
-                <a16:creationId xmlns:a16="http://schemas.microsoft.com/office/drawing/2014/main" id="{DA4B2275-60C8-40CA-68AA-A5172C13234E}"/>
+                <a16:creationId xmlns:a16="http://schemas.microsoft.com/office/drawing/2014/main" id="{E18E0184-5FC4-4350-120B-B3C3288C708C}"/>
               </a:ext>
             </a:extLst>
           </p:cNvPr>
@@ -5694,7 +5688,7 @@
     </p:spTree>
     <p:extLst>
       <p:ext uri="{BB962C8B-B14F-4D97-AF65-F5344CB8AC3E}">
-        <p14:creationId xmlns:p14="http://schemas.microsoft.com/office/powerpoint/2010/main" val="2028724173"/>
+        <p14:creationId xmlns:p14="http://schemas.microsoft.com/office/powerpoint/2010/main" val="981588414"/>
       </p:ext>
     </p:extLst>
   </p:cSld>
